--- a/dashboard/dashboard.pptx
+++ b/dashboard/dashboard.pptx
@@ -104,6 +104,11 @@
       </a:defRPr>
     </a:lvl9pPr>
   </p:defaultTextStyle>
+  <p:extLst>
+    <p:ext uri="{EFAFB233-063F-42B5-8137-9DF3F51BA10A}">
+      <p15:sldGuideLst xmlns:p15="http://schemas.microsoft.com/office/powerpoint/2012/main"/>
+    </p:ext>
+  </p:extLst>
 </p:presentation>
 </file>
 
@@ -6429,28 +6434,31 @@
   <cx:chart>
     <cx:title pos="t" align="ctr" overlay="0">
       <cx:tx>
-        <cx:rich>
-          <a:bodyPr spcFirstLastPara="1" vertOverflow="ellipsis" horzOverflow="overflow" wrap="square" lIns="0" tIns="0" rIns="0" bIns="0" anchor="ctr" anchorCtr="1"/>
-          <a:lstStyle/>
-          <a:p>
-            <a:pPr algn="ctr" rtl="0">
-              <a:defRPr/>
-            </a:pPr>
-            <a:r>
-              <a:rPr lang="en-GB" sz="1400" b="0" i="0" u="none" strike="noStrike" baseline="0" dirty="0">
-                <a:solidFill>
-                  <a:sysClr val="windowText" lastClr="000000">
-                    <a:lumMod val="65000"/>
-                    <a:lumOff val="35000"/>
-                  </a:sysClr>
-                </a:solidFill>
-                <a:latin typeface="Aptos Narrow" panose="02110004020202020204"/>
-              </a:rPr>
-              <a:t>Severe Anxiety in University</a:t>
-            </a:r>
-          </a:p>
-        </cx:rich>
+        <cx:txData>
+          <cx:v>Severe Anxiety in University</cx:v>
+        </cx:txData>
       </cx:tx>
+      <cx:txPr>
+        <a:bodyPr spcFirstLastPara="1" vertOverflow="ellipsis" horzOverflow="overflow" wrap="square" lIns="0" tIns="0" rIns="0" bIns="0" anchor="ctr" anchorCtr="1"/>
+        <a:lstStyle/>
+        <a:p>
+          <a:pPr algn="ctr" rtl="0">
+            <a:defRPr/>
+          </a:pPr>
+          <a:r>
+            <a:rPr lang="en-GB" sz="1400" b="0" i="0" u="none" strike="noStrike" baseline="0" dirty="0">
+              <a:solidFill>
+                <a:sysClr val="windowText" lastClr="000000">
+                  <a:lumMod val="65000"/>
+                  <a:lumOff val="35000"/>
+                </a:sysClr>
+              </a:solidFill>
+              <a:latin typeface="Aptos Narrow" panose="02110004020202020204"/>
+            </a:rPr>
+            <a:t>Severe Anxiety in University</a:t>
+          </a:r>
+        </a:p>
+      </cx:txPr>
     </cx:title>
     <cx:plotArea>
       <cx:plotAreaRegion>
@@ -6536,44 +6544,47 @@
   <cx:chart>
     <cx:title pos="t" align="ctr" overlay="0">
       <cx:tx>
-        <cx:rich>
-          <a:bodyPr rot="0" spcFirstLastPara="1" vertOverflow="ellipsis" vert="horz" wrap="square" lIns="38100" tIns="19050" rIns="38100" bIns="19050" anchor="ctr" anchorCtr="1" compatLnSpc="0"/>
-          <a:lstStyle/>
-          <a:p>
-            <a:pPr algn="ctr" rtl="0">
-              <a:defRPr sz="1400" b="0" i="0" u="none" strike="noStrike" kern="1200" spc="0" baseline="0">
-                <a:solidFill>
-                  <a:sysClr val="windowText" lastClr="000000">
-                    <a:lumMod val="65000"/>
-                    <a:lumOff val="35000"/>
-                  </a:sysClr>
-                </a:solidFill>
-                <a:latin typeface="+mn-lt"/>
-                <a:ea typeface="+mn-ea"/>
-                <a:cs typeface="+mn-cs"/>
-              </a:defRPr>
-            </a:pPr>
-            <a:r>
-              <a:rPr kumimoji="0" lang="en-US" sz="1400" b="0" i="0" u="none" strike="noStrike" kern="1200" cap="none" spc="0" normalizeH="0" baseline="0" noProof="0" dirty="0">
-                <a:ln>
-                  <a:noFill/>
-                </a:ln>
-                <a:solidFill>
-                  <a:sysClr val="windowText" lastClr="000000">
-                    <a:lumMod val="65000"/>
-                    <a:lumOff val="35000"/>
-                  </a:sysClr>
-                </a:solidFill>
-                <a:effectLst/>
-                <a:uLnTx/>
-                <a:uFillTx/>
-                <a:latin typeface="Aptos Narrow" panose="02110004020202020204"/>
-              </a:rPr>
-              <a:t>Severe Anxiety in Department</a:t>
-            </a:r>
-          </a:p>
-        </cx:rich>
+        <cx:txData>
+          <cx:v>Severe Anxiety in Department</cx:v>
+        </cx:txData>
       </cx:tx>
+      <cx:txPr>
+        <a:bodyPr rot="0" spcFirstLastPara="1" vertOverflow="ellipsis" vert="horz" wrap="square" lIns="38100" tIns="19050" rIns="38100" bIns="19050" anchor="ctr" anchorCtr="1" compatLnSpc="0"/>
+        <a:lstStyle/>
+        <a:p>
+          <a:pPr algn="ctr" rtl="0">
+            <a:defRPr sz="1400" b="0" i="0" u="none" strike="noStrike" kern="1200" spc="0" baseline="0">
+              <a:solidFill>
+                <a:sysClr val="windowText" lastClr="000000">
+                  <a:lumMod val="65000"/>
+                  <a:lumOff val="35000"/>
+                </a:sysClr>
+              </a:solidFill>
+              <a:latin typeface="+mn-lt"/>
+              <a:ea typeface="+mn-ea"/>
+              <a:cs typeface="+mn-cs"/>
+            </a:defRPr>
+          </a:pPr>
+          <a:r>
+            <a:rPr kumimoji="0" lang="en-US" sz="1400" b="0" i="0" u="none" strike="noStrike" kern="1200" cap="none" spc="0" normalizeH="0" baseline="0" noProof="0" dirty="0">
+              <a:ln>
+                <a:noFill/>
+              </a:ln>
+              <a:solidFill>
+                <a:sysClr val="windowText" lastClr="000000">
+                  <a:lumMod val="65000"/>
+                  <a:lumOff val="35000"/>
+                </a:sysClr>
+              </a:solidFill>
+              <a:effectLst/>
+              <a:uLnTx/>
+              <a:uFillTx/>
+              <a:latin typeface="Aptos Narrow" panose="02110004020202020204"/>
+            </a:rPr>
+            <a:t>Severe Anxiety in Department</a:t>
+          </a:r>
+        </a:p>
+      </cx:txPr>
     </cx:title>
     <cx:plotArea>
       <cx:plotAreaRegion>
@@ -11802,7 +11813,7 @@
           <a:p>
             <a:fld id="{FD3EC942-BB70-4E76-8AE2-6AB6D073FD99}" type="datetimeFigureOut">
               <a:rPr lang="en-NZ" smtClean="0"/>
-              <a:t>6/06/2026</a:t>
+              <a:t>23/06/2026</a:t>
             </a:fld>
             <a:endParaRPr lang="en-NZ"/>
           </a:p>
@@ -11972,7 +11983,7 @@
           <a:p>
             <a:fld id="{FD3EC942-BB70-4E76-8AE2-6AB6D073FD99}" type="datetimeFigureOut">
               <a:rPr lang="en-NZ" smtClean="0"/>
-              <a:t>6/06/2026</a:t>
+              <a:t>23/06/2026</a:t>
             </a:fld>
             <a:endParaRPr lang="en-NZ"/>
           </a:p>
@@ -12152,7 +12163,7 @@
           <a:p>
             <a:fld id="{FD3EC942-BB70-4E76-8AE2-6AB6D073FD99}" type="datetimeFigureOut">
               <a:rPr lang="en-NZ" smtClean="0"/>
-              <a:t>6/06/2026</a:t>
+              <a:t>23/06/2026</a:t>
             </a:fld>
             <a:endParaRPr lang="en-NZ"/>
           </a:p>
@@ -12322,7 +12333,7 @@
           <a:p>
             <a:fld id="{FD3EC942-BB70-4E76-8AE2-6AB6D073FD99}" type="datetimeFigureOut">
               <a:rPr lang="en-NZ" smtClean="0"/>
-              <a:t>6/06/2026</a:t>
+              <a:t>23/06/2026</a:t>
             </a:fld>
             <a:endParaRPr lang="en-NZ"/>
           </a:p>
@@ -12568,7 +12579,7 @@
           <a:p>
             <a:fld id="{FD3EC942-BB70-4E76-8AE2-6AB6D073FD99}" type="datetimeFigureOut">
               <a:rPr lang="en-NZ" smtClean="0"/>
-              <a:t>6/06/2026</a:t>
+              <a:t>23/06/2026</a:t>
             </a:fld>
             <a:endParaRPr lang="en-NZ"/>
           </a:p>
@@ -12800,7 +12811,7 @@
           <a:p>
             <a:fld id="{FD3EC942-BB70-4E76-8AE2-6AB6D073FD99}" type="datetimeFigureOut">
               <a:rPr lang="en-NZ" smtClean="0"/>
-              <a:t>6/06/2026</a:t>
+              <a:t>23/06/2026</a:t>
             </a:fld>
             <a:endParaRPr lang="en-NZ"/>
           </a:p>
@@ -13167,7 +13178,7 @@
           <a:p>
             <a:fld id="{FD3EC942-BB70-4E76-8AE2-6AB6D073FD99}" type="datetimeFigureOut">
               <a:rPr lang="en-NZ" smtClean="0"/>
-              <a:t>6/06/2026</a:t>
+              <a:t>23/06/2026</a:t>
             </a:fld>
             <a:endParaRPr lang="en-NZ"/>
           </a:p>
@@ -13285,7 +13296,7 @@
           <a:p>
             <a:fld id="{FD3EC942-BB70-4E76-8AE2-6AB6D073FD99}" type="datetimeFigureOut">
               <a:rPr lang="en-NZ" smtClean="0"/>
-              <a:t>6/06/2026</a:t>
+              <a:t>23/06/2026</a:t>
             </a:fld>
             <a:endParaRPr lang="en-NZ"/>
           </a:p>
@@ -13380,7 +13391,7 @@
           <a:p>
             <a:fld id="{FD3EC942-BB70-4E76-8AE2-6AB6D073FD99}" type="datetimeFigureOut">
               <a:rPr lang="en-NZ" smtClean="0"/>
-              <a:t>6/06/2026</a:t>
+              <a:t>23/06/2026</a:t>
             </a:fld>
             <a:endParaRPr lang="en-NZ"/>
           </a:p>
@@ -13657,7 +13668,7 @@
           <a:p>
             <a:fld id="{FD3EC942-BB70-4E76-8AE2-6AB6D073FD99}" type="datetimeFigureOut">
               <a:rPr lang="en-NZ" smtClean="0"/>
-              <a:t>6/06/2026</a:t>
+              <a:t>23/06/2026</a:t>
             </a:fld>
             <a:endParaRPr lang="en-NZ"/>
           </a:p>
@@ -13914,7 +13925,7 @@
           <a:p>
             <a:fld id="{FD3EC942-BB70-4E76-8AE2-6AB6D073FD99}" type="datetimeFigureOut">
               <a:rPr lang="en-NZ" smtClean="0"/>
-              <a:t>6/06/2026</a:t>
+              <a:t>23/06/2026</a:t>
             </a:fld>
             <a:endParaRPr lang="en-NZ"/>
           </a:p>
@@ -14127,7 +14138,7 @@
           <a:p>
             <a:fld id="{FD3EC942-BB70-4E76-8AE2-6AB6D073FD99}" type="datetimeFigureOut">
               <a:rPr lang="en-NZ" smtClean="0"/>
-              <a:t>6/06/2026</a:t>
+              <a:t>23/06/2026</a:t>
             </a:fld>
             <a:endParaRPr lang="en-NZ"/>
           </a:p>
@@ -14591,7 +14602,7 @@
           <p:nvPr>
             <p:extLst>
               <p:ext uri="{D42A27DB-BD31-4B8C-83A1-F6EECF244321}">
-                <p14:modId xmlns:p14="http://schemas.microsoft.com/office/powerpoint/2010/main" val="3265398352"/>
+                <p14:modId xmlns:p14="http://schemas.microsoft.com/office/powerpoint/2010/main" val="169636161"/>
               </p:ext>
             </p:extLst>
           </p:nvPr>
@@ -14619,7 +14630,7 @@
           <p:nvPr>
             <p:extLst>
               <p:ext uri="{D42A27DB-BD31-4B8C-83A1-F6EECF244321}">
-                <p14:modId xmlns:p14="http://schemas.microsoft.com/office/powerpoint/2010/main" val="2934935444"/>
+                <p14:modId xmlns:p14="http://schemas.microsoft.com/office/powerpoint/2010/main" val="150864822"/>
               </p:ext>
             </p:extLst>
           </p:nvPr>
@@ -14647,7 +14658,7 @@
           <p:nvPr>
             <p:extLst>
               <p:ext uri="{D42A27DB-BD31-4B8C-83A1-F6EECF244321}">
-                <p14:modId xmlns:p14="http://schemas.microsoft.com/office/powerpoint/2010/main" val="4005569537"/>
+                <p14:modId xmlns:p14="http://schemas.microsoft.com/office/powerpoint/2010/main" val="3780512616"/>
               </p:ext>
             </p:extLst>
           </p:nvPr>
@@ -14677,7 +14688,7 @@
               <p:nvPr>
                 <p:extLst>
                   <p:ext uri="{D42A27DB-BD31-4B8C-83A1-F6EECF244321}">
-                    <p14:modId xmlns:p14="http://schemas.microsoft.com/office/powerpoint/2010/main" val="1435984440"/>
+                    <p14:modId xmlns:p14="http://schemas.microsoft.com/office/powerpoint/2010/main" val="2462646421"/>
                   </p:ext>
                 </p:extLst>
               </p:nvPr>
@@ -14741,7 +14752,7 @@
               <p:nvPr>
                 <p:extLst>
                   <p:ext uri="{D42A27DB-BD31-4B8C-83A1-F6EECF244321}">
-                    <p14:modId xmlns:p14="http://schemas.microsoft.com/office/powerpoint/2010/main" val="3551629553"/>
+                    <p14:modId xmlns:p14="http://schemas.microsoft.com/office/powerpoint/2010/main" val="857010885"/>
                   </p:ext>
                 </p:extLst>
               </p:nvPr>
@@ -14803,7 +14814,7 @@
           <p:nvPr>
             <p:extLst>
               <p:ext uri="{D42A27DB-BD31-4B8C-83A1-F6EECF244321}">
-                <p14:modId xmlns:p14="http://schemas.microsoft.com/office/powerpoint/2010/main" val="3227936205"/>
+                <p14:modId xmlns:p14="http://schemas.microsoft.com/office/powerpoint/2010/main" val="3064650877"/>
               </p:ext>
             </p:extLst>
           </p:nvPr>
@@ -14831,7 +14842,7 @@
           <p:nvPr>
             <p:extLst>
               <p:ext uri="{D42A27DB-BD31-4B8C-83A1-F6EECF244321}">
-                <p14:modId xmlns:p14="http://schemas.microsoft.com/office/powerpoint/2010/main" val="1655285233"/>
+                <p14:modId xmlns:p14="http://schemas.microsoft.com/office/powerpoint/2010/main" val="3495202362"/>
               </p:ext>
             </p:extLst>
           </p:nvPr>
@@ -14859,7 +14870,7 @@
           <p:nvPr>
             <p:extLst>
               <p:ext uri="{D42A27DB-BD31-4B8C-83A1-F6EECF244321}">
-                <p14:modId xmlns:p14="http://schemas.microsoft.com/office/powerpoint/2010/main" val="2872318952"/>
+                <p14:modId xmlns:p14="http://schemas.microsoft.com/office/powerpoint/2010/main" val="1553552589"/>
               </p:ext>
             </p:extLst>
           </p:nvPr>
@@ -14887,7 +14898,7 @@
           <p:nvPr>
             <p:extLst>
               <p:ext uri="{D42A27DB-BD31-4B8C-83A1-F6EECF244321}">
-                <p14:modId xmlns:p14="http://schemas.microsoft.com/office/powerpoint/2010/main" val="2830908502"/>
+                <p14:modId xmlns:p14="http://schemas.microsoft.com/office/powerpoint/2010/main" val="424622142"/>
               </p:ext>
             </p:extLst>
           </p:nvPr>
